--- a/01_改修設計/UDS/スマホ画面入庫回収機能/操作マニュアル_スマホ版UDS.pptx
+++ b/01_改修設計/UDS/スマホ画面入庫回収機能/操作マニュアル_スマホ版UDS.pptx
@@ -12,6 +12,7 @@
     <p:sldId id="260" r:id="rId11"/>
     <p:sldId id="261" r:id="rId12"/>
     <p:sldId id="262" r:id="rId13"/>
+    <p:sldId id="268" r:id="rId19"/>
     <p:sldId id="263" r:id="rId14"/>
     <p:sldId id="264" r:id="rId15"/>
     <p:sldId id="265" r:id="rId16"/>
@@ -3682,7 +3683,7 @@
                 </a:solidFill>
                 <a:latin typeface="游ゴシック"/>
               </a:rPr>
-              <a:t>困ったときのリファレンス</a:t>
+              <a:t>STEP 6 / 6</a:t>
             </a:r>
           </a:p>
         </p:txBody>
@@ -3721,7 +3722,594 @@
                 </a:solidFill>
                 <a:latin typeface="游ゴシック"/>
               </a:rPr>
-              <a:t>エラー・要案内メッセージの見方</a:t>
+              <a:t>結果を確認する</a:t>
+            </a:r>
+          </a:p>
+        </p:txBody>
+      </p:sp>
+      <p:sp>
+        <p:nvSpPr>
+          <p:cNvPr id="6" name="TextBox 5"/>
+          <p:cNvSpPr txBox="1"/>
+          <p:nvPr/>
+        </p:nvSpPr>
+        <p:spPr>
+          <a:xfrm>
+            <a:off x="640080" y="1600200"/>
+            <a:ext cx="10881360" cy="2194560"/>
+          </a:xfrm>
+          <a:prstGeom prst="rect">
+            <a:avLst/>
+          </a:prstGeom>
+          <a:noFill/>
+        </p:spPr>
+        <p:txBody>
+          <a:bodyPr wrap="square" anchor="t" lIns="0" rIns="0" tIns="0" bIns="0">
+            <a:spAutoFit/>
+          </a:bodyPr>
+          <a:lstStyle/>
+          <a:p>
+            <a:pPr algn="l">
+              <a:lnSpc>
+                <a:spcPct val="135000"/>
+              </a:lnSpc>
+            </a:pPr>
+            <a:r>
+              <a:rPr sz="1400" b="0">
+                <a:solidFill>
+                  <a:srgbClr val="4B5A70"/>
+                </a:solidFill>
+                <a:latin typeface="游ゴシック"/>
+              </a:rPr>
+              <a:t>実行すると、成功・エラーの2パターンで結果が表示されます。成功した分はそのまま確定されるので、エラーの端末だけ確認すれば大丈夫です。</a:t>
+            </a:r>
+          </a:p>
+        </p:txBody>
+      </p:sp>
+      <p:sp>
+        <p:nvSpPr>
+          <p:cNvPr id="7" name="Rounded Rectangle 6"/>
+          <p:cNvSpPr/>
+          <p:nvPr/>
+        </p:nvSpPr>
+        <p:spPr>
+          <a:xfrm>
+            <a:off x="640080" y="2651760"/>
+            <a:ext cx="5271516" cy="3108960"/>
+          </a:xfrm>
+          <a:prstGeom prst="roundRect">
+            <a:avLst>
+              <a:gd name="adj" fmla="val 6000"/>
+            </a:avLst>
+          </a:prstGeom>
+          <a:solidFill>
+            <a:srgbClr val="FFFFFF"/>
+          </a:solidFill>
+          <a:ln w="9525">
+            <a:solidFill>
+              <a:srgbClr val="DBE1EC"/>
+            </a:solidFill>
+          </a:ln>
+          <a:effectLst/>
+        </p:spPr>
+        <p:style>
+          <a:lnRef idx="1">
+            <a:schemeClr val="accent1"/>
+          </a:lnRef>
+          <a:fillRef idx="3">
+            <a:schemeClr val="accent1"/>
+          </a:fillRef>
+          <a:effectRef idx="2">
+            <a:schemeClr val="accent1"/>
+          </a:effectRef>
+          <a:fontRef idx="minor">
+            <a:schemeClr val="lt1"/>
+          </a:fontRef>
+        </p:style>
+        <p:txBody>
+          <a:bodyPr rtlCol="0" anchor="ctr"/>
+          <a:lstStyle/>
+          <a:p>
+            <a:pPr algn="ctr"/>
+          </a:p>
+        </p:txBody>
+      </p:sp>
+      <p:sp>
+        <p:nvSpPr>
+          <p:cNvPr id="8" name="Rounded Rectangle 7"/>
+          <p:cNvSpPr/>
+          <p:nvPr/>
+        </p:nvSpPr>
+        <p:spPr>
+          <a:xfrm>
+            <a:off x="1033686" y="2880360"/>
+            <a:ext cx="1546311" cy="329184"/>
+          </a:xfrm>
+          <a:prstGeom prst="roundRect">
+            <a:avLst>
+              <a:gd name="adj" fmla="val 50000"/>
+            </a:avLst>
+          </a:prstGeom>
+          <a:solidFill>
+            <a:srgbClr val="0EAF7C"/>
+          </a:solidFill>
+          <a:ln>
+            <a:noFill/>
+          </a:ln>
+          <a:effectLst/>
+        </p:spPr>
+        <p:style>
+          <a:lnRef idx="1">
+            <a:schemeClr val="accent1"/>
+          </a:lnRef>
+          <a:fillRef idx="3">
+            <a:schemeClr val="accent1"/>
+          </a:fillRef>
+          <a:effectRef idx="2">
+            <a:schemeClr val="accent1"/>
+          </a:effectRef>
+          <a:fontRef idx="minor">
+            <a:schemeClr val="lt1"/>
+          </a:fontRef>
+        </p:style>
+        <p:txBody>
+          <a:bodyPr rtlCol="0" anchor="ctr" wrap="none" lIns="0" rIns="0" tIns="0" bIns="0"/>
+          <a:lstStyle/>
+          <a:p>
+            <a:pPr algn="ctr"/>
+            <a:r>
+              <a:rPr sz="1000" b="1">
+                <a:solidFill>
+                  <a:srgbClr val="FFFFFF"/>
+                </a:solidFill>
+                <a:latin typeface="游ゴシック"/>
+              </a:rPr>
+              <a:t>成功</a:t>
+            </a:r>
+          </a:p>
+        </p:txBody>
+      </p:sp>
+      <p:sp>
+        <p:nvSpPr>
+          <p:cNvPr id="9" name="TextBox 8"/>
+          <p:cNvSpPr txBox="1"/>
+          <p:nvPr/>
+        </p:nvSpPr>
+        <p:spPr>
+          <a:xfrm>
+            <a:off x="1033686" y="3337560"/>
+            <a:ext cx="4484302" cy="640080"/>
+          </a:xfrm>
+          <a:prstGeom prst="rect">
+            <a:avLst/>
+          </a:prstGeom>
+          <a:noFill/>
+        </p:spPr>
+        <p:txBody>
+          <a:bodyPr wrap="square" anchor="t" lIns="0" rIns="0" tIns="0" bIns="0">
+            <a:spAutoFit/>
+          </a:bodyPr>
+          <a:lstStyle/>
+          <a:p>
+            <a:pPr algn="l">
+              <a:lnSpc>
+                <a:spcPct val="120000"/>
+              </a:lnSpc>
+            </a:pPr>
+            <a:r>
+              <a:rPr sz="1500" b="1">
+                <a:solidFill>
+                  <a:srgbClr val="172233"/>
+                </a:solidFill>
+                <a:latin typeface="游ゴシック"/>
+              </a:rPr>
+              <a:t>✓ 処理が完了しました</a:t>
+            </a:r>
+          </a:p>
+        </p:txBody>
+      </p:sp>
+      <p:sp>
+        <p:nvSpPr>
+          <p:cNvPr id="10" name="TextBox 9"/>
+          <p:cNvSpPr txBox="1"/>
+          <p:nvPr/>
+        </p:nvSpPr>
+        <p:spPr>
+          <a:xfrm>
+            <a:off x="1033686" y="3977639"/>
+            <a:ext cx="4484302" cy="1554480"/>
+          </a:xfrm>
+          <a:prstGeom prst="rect">
+            <a:avLst/>
+          </a:prstGeom>
+          <a:noFill/>
+        </p:spPr>
+        <p:txBody>
+          <a:bodyPr wrap="square" anchor="t" lIns="0" rIns="0" tIns="0" bIns="0">
+            <a:spAutoFit/>
+          </a:bodyPr>
+          <a:lstStyle/>
+          <a:p>
+            <a:pPr algn="l">
+              <a:lnSpc>
+                <a:spcPct val="140000"/>
+              </a:lnSpc>
+            </a:pPr>
+            <a:r>
+              <a:rPr sz="1200" b="0">
+                <a:solidFill>
+                  <a:srgbClr val="4B5A70"/>
+                </a:solidFill>
+                <a:latin typeface="游ゴシック"/>
+              </a:rPr>
+              <a:t>読み取った端末の登録が完了しています。特に対応は不要です。</a:t>
+            </a:r>
+          </a:p>
+        </p:txBody>
+      </p:sp>
+      <p:sp>
+        <p:nvSpPr>
+          <p:cNvPr id="11" name="Rounded Rectangle 10"/>
+          <p:cNvSpPr/>
+          <p:nvPr/>
+        </p:nvSpPr>
+        <p:spPr>
+          <a:xfrm>
+            <a:off x="6167628" y="2651760"/>
+            <a:ext cx="5271516" cy="3108960"/>
+          </a:xfrm>
+          <a:prstGeom prst="roundRect">
+            <a:avLst>
+              <a:gd name="adj" fmla="val 6000"/>
+            </a:avLst>
+          </a:prstGeom>
+          <a:solidFill>
+            <a:srgbClr val="FFFFFF"/>
+          </a:solidFill>
+          <a:ln w="9525">
+            <a:solidFill>
+              <a:srgbClr val="DBE1EC"/>
+            </a:solidFill>
+          </a:ln>
+          <a:effectLst/>
+        </p:spPr>
+        <p:style>
+          <a:lnRef idx="1">
+            <a:schemeClr val="accent1"/>
+          </a:lnRef>
+          <a:fillRef idx="3">
+            <a:schemeClr val="accent1"/>
+          </a:fillRef>
+          <a:effectRef idx="2">
+            <a:schemeClr val="accent1"/>
+          </a:effectRef>
+          <a:fontRef idx="minor">
+            <a:schemeClr val="lt1"/>
+          </a:fontRef>
+        </p:style>
+        <p:txBody>
+          <a:bodyPr rtlCol="0" anchor="ctr"/>
+          <a:lstStyle/>
+          <a:p>
+            <a:pPr algn="ctr"/>
+          </a:p>
+        </p:txBody>
+      </p:sp>
+      <p:sp>
+        <p:nvSpPr>
+          <p:cNvPr id="12" name="Rounded Rectangle 11"/>
+          <p:cNvSpPr/>
+          <p:nvPr/>
+        </p:nvSpPr>
+        <p:spPr>
+          <a:xfrm>
+            <a:off x="6561234" y="2880360"/>
+            <a:ext cx="1546311" cy="329184"/>
+          </a:xfrm>
+          <a:prstGeom prst="roundRect">
+            <a:avLst>
+              <a:gd name="adj" fmla="val 50000"/>
+            </a:avLst>
+          </a:prstGeom>
+          <a:solidFill>
+            <a:srgbClr val="D8433F"/>
+          </a:solidFill>
+          <a:ln>
+            <a:noFill/>
+          </a:ln>
+          <a:effectLst/>
+        </p:spPr>
+        <p:style>
+          <a:lnRef idx="1">
+            <a:schemeClr val="accent1"/>
+          </a:lnRef>
+          <a:fillRef idx="3">
+            <a:schemeClr val="accent1"/>
+          </a:fillRef>
+          <a:effectRef idx="2">
+            <a:schemeClr val="accent1"/>
+          </a:effectRef>
+          <a:fontRef idx="minor">
+            <a:schemeClr val="lt1"/>
+          </a:fontRef>
+        </p:style>
+        <p:txBody>
+          <a:bodyPr rtlCol="0" anchor="ctr" wrap="none" lIns="0" rIns="0" tIns="0" bIns="0"/>
+          <a:lstStyle/>
+          <a:p>
+            <a:pPr algn="ctr"/>
+            <a:r>
+              <a:rPr sz="1000" b="1">
+                <a:solidFill>
+                  <a:srgbClr val="FFFFFF"/>
+                </a:solidFill>
+                <a:latin typeface="游ゴシック"/>
+              </a:rPr>
+              <a:t>エラー</a:t>
+            </a:r>
+          </a:p>
+        </p:txBody>
+      </p:sp>
+      <p:sp>
+        <p:nvSpPr>
+          <p:cNvPr id="13" name="TextBox 12"/>
+          <p:cNvSpPr txBox="1"/>
+          <p:nvPr/>
+        </p:nvSpPr>
+        <p:spPr>
+          <a:xfrm>
+            <a:off x="6561234" y="3337560"/>
+            <a:ext cx="4484302" cy="640080"/>
+          </a:xfrm>
+          <a:prstGeom prst="rect">
+            <a:avLst/>
+          </a:prstGeom>
+          <a:noFill/>
+        </p:spPr>
+        <p:txBody>
+          <a:bodyPr wrap="square" anchor="t" lIns="0" rIns="0" tIns="0" bIns="0">
+            <a:spAutoFit/>
+          </a:bodyPr>
+          <a:lstStyle/>
+          <a:p>
+            <a:pPr algn="l">
+              <a:lnSpc>
+                <a:spcPct val="120000"/>
+              </a:lnSpc>
+            </a:pPr>
+            <a:r>
+              <a:rPr sz="1500" b="1">
+                <a:solidFill>
+                  <a:srgbClr val="172233"/>
+                </a:solidFill>
+                <a:latin typeface="游ゴシック"/>
+              </a:rPr>
+              <a:t>⚠ 一部の処理に失敗しました</a:t>
+            </a:r>
+          </a:p>
+        </p:txBody>
+      </p:sp>
+      <p:sp>
+        <p:nvSpPr>
+          <p:cNvPr id="14" name="TextBox 13"/>
+          <p:cNvSpPr txBox="1"/>
+          <p:nvPr/>
+        </p:nvSpPr>
+        <p:spPr>
+          <a:xfrm>
+            <a:off x="6561234" y="3977639"/>
+            <a:ext cx="4484302" cy="1554480"/>
+          </a:xfrm>
+          <a:prstGeom prst="rect">
+            <a:avLst/>
+          </a:prstGeom>
+          <a:noFill/>
+        </p:spPr>
+        <p:txBody>
+          <a:bodyPr wrap="square" anchor="t" lIns="0" rIns="0" tIns="0" bIns="0">
+            <a:spAutoFit/>
+          </a:bodyPr>
+          <a:lstStyle/>
+          <a:p>
+            <a:pPr algn="l">
+              <a:lnSpc>
+                <a:spcPct val="140000"/>
+              </a:lnSpc>
+            </a:pPr>
+            <a:r>
+              <a:rPr sz="1200" b="0">
+                <a:solidFill>
+                  <a:srgbClr val="4B5A70"/>
+                </a:solidFill>
+                <a:latin typeface="游ゴシック"/>
+              </a:rPr>
+              <a:t>エラーの端末とメッセージが表示されます。「続けて処理する」で再度スキャンしてやり直せます。</a:t>
+            </a:r>
+          </a:p>
+        </p:txBody>
+      </p:sp>
+    </p:spTree>
+  </p:cSld>
+  <p:clrMapOvr>
+    <a:masterClrMapping/>
+  </p:clrMapOvr>
+</p:sld>
+</file>
+
+<file path=ppt/slides/slide11.xml><?xml version="1.0" encoding="utf-8"?>
+<p:sld xmlns:a="http://schemas.openxmlformats.org/drawingml/2006/main" xmlns:p="http://schemas.openxmlformats.org/presentationml/2006/main" xmlns:r="http://schemas.openxmlformats.org/officeDocument/2006/relationships">
+  <p:cSld>
+    <p:spTree>
+      <p:nvGrpSpPr>
+        <p:cNvPr id="1" name=""/>
+        <p:cNvGrpSpPr/>
+        <p:nvPr/>
+      </p:nvGrpSpPr>
+      <p:grpSpPr/>
+      <p:sp>
+        <p:nvSpPr>
+          <p:cNvPr id="2" name="Rectangle 1"/>
+          <p:cNvSpPr/>
+          <p:nvPr/>
+        </p:nvSpPr>
+        <p:spPr>
+          <a:xfrm>
+            <a:off x="0" y="0"/>
+            <a:ext cx="12191695" cy="6858000"/>
+          </a:xfrm>
+          <a:prstGeom prst="rect">
+            <a:avLst/>
+          </a:prstGeom>
+          <a:solidFill>
+            <a:srgbClr val="F5F6FA"/>
+          </a:solidFill>
+          <a:ln>
+            <a:noFill/>
+          </a:ln>
+          <a:effectLst/>
+        </p:spPr>
+        <p:style>
+          <a:lnRef idx="1">
+            <a:schemeClr val="accent1"/>
+          </a:lnRef>
+          <a:fillRef idx="3">
+            <a:schemeClr val="accent1"/>
+          </a:fillRef>
+          <a:effectRef idx="2">
+            <a:schemeClr val="accent1"/>
+          </a:effectRef>
+          <a:fontRef idx="minor">
+            <a:schemeClr val="lt1"/>
+          </a:fontRef>
+        </p:style>
+        <p:txBody>
+          <a:bodyPr rtlCol="0" anchor="ctr"/>
+          <a:lstStyle/>
+          <a:p>
+            <a:pPr algn="ctr"/>
+          </a:p>
+        </p:txBody>
+      </p:sp>
+      <p:sp>
+        <p:nvSpPr>
+          <p:cNvPr id="3" name="Rounded Rectangle 2"/>
+          <p:cNvSpPr/>
+          <p:nvPr/>
+        </p:nvSpPr>
+        <p:spPr>
+          <a:xfrm>
+            <a:off x="640080" y="530352"/>
+            <a:ext cx="292608" cy="1"/>
+          </a:xfrm>
+          <a:prstGeom prst="roundRect">
+            <a:avLst>
+              <a:gd name="adj" fmla="val 50000"/>
+            </a:avLst>
+          </a:prstGeom>
+          <a:solidFill>
+            <a:srgbClr val="2E6FDB"/>
+          </a:solidFill>
+          <a:ln>
+            <a:noFill/>
+          </a:ln>
+          <a:effectLst/>
+        </p:spPr>
+        <p:style>
+          <a:lnRef idx="1">
+            <a:schemeClr val="accent1"/>
+          </a:lnRef>
+          <a:fillRef idx="3">
+            <a:schemeClr val="accent1"/>
+          </a:fillRef>
+          <a:effectRef idx="2">
+            <a:schemeClr val="accent1"/>
+          </a:effectRef>
+          <a:fontRef idx="minor">
+            <a:schemeClr val="lt1"/>
+          </a:fontRef>
+        </p:style>
+        <p:txBody>
+          <a:bodyPr rtlCol="0" anchor="ctr"/>
+          <a:lstStyle/>
+          <a:p>
+            <a:pPr algn="ctr"/>
+          </a:p>
+        </p:txBody>
+      </p:sp>
+      <p:sp>
+        <p:nvSpPr>
+          <p:cNvPr id="4" name="TextBox 3"/>
+          <p:cNvSpPr txBox="1"/>
+          <p:nvPr/>
+        </p:nvSpPr>
+        <p:spPr>
+          <a:xfrm>
+            <a:off x="1024128" y="457200"/>
+            <a:ext cx="5486400" cy="320040"/>
+          </a:xfrm>
+          <a:prstGeom prst="rect">
+            <a:avLst/>
+          </a:prstGeom>
+          <a:noFill/>
+        </p:spPr>
+        <p:txBody>
+          <a:bodyPr wrap="square" anchor="t" lIns="0" rIns="0" tIns="0" bIns="0">
+            <a:spAutoFit/>
+          </a:bodyPr>
+          <a:lstStyle/>
+          <a:p>
+            <a:pPr algn="l">
+              <a:lnSpc>
+                <a:spcPct val="100000"/>
+              </a:lnSpc>
+            </a:pPr>
+            <a:r>
+              <a:rPr sz="1200" b="1">
+                <a:solidFill>
+                  <a:srgbClr val="2E6FDB"/>
+                </a:solidFill>
+                <a:latin typeface="游ゴシック"/>
+              </a:rPr>
+              <a:t>困ったときのリファレンス</a:t>
+            </a:r>
+          </a:p>
+        </p:txBody>
+      </p:sp>
+      <p:sp>
+        <p:nvSpPr>
+          <p:cNvPr id="5" name="TextBox 4"/>
+          <p:cNvSpPr txBox="1"/>
+          <p:nvPr/>
+        </p:nvSpPr>
+        <p:spPr>
+          <a:xfrm>
+            <a:off x="640080" y="777240"/>
+            <a:ext cx="10881360" cy="822960"/>
+          </a:xfrm>
+          <a:prstGeom prst="rect">
+            <a:avLst/>
+          </a:prstGeom>
+          <a:noFill/>
+        </p:spPr>
+        <p:txBody>
+          <a:bodyPr wrap="square" anchor="t" lIns="0" rIns="0" tIns="0" bIns="0">
+            <a:spAutoFit/>
+          </a:bodyPr>
+          <a:lstStyle/>
+          <a:p>
+            <a:pPr algn="l">
+              <a:lnSpc>
+                <a:spcPct val="100000"/>
+              </a:lnSpc>
+            </a:pPr>
+            <a:r>
+              <a:rPr sz="3000" b="1">
+                <a:solidFill>
+                  <a:srgbClr val="172233"/>
+                </a:solidFill>
+                <a:latin typeface="游ゴシック"/>
+              </a:rPr>
+              <a:t>エラーメッセージの見方</a:t>
             </a:r>
           </a:p>
         </p:txBody>
@@ -3846,7 +4434,7 @@
                           </a:solidFill>
                           <a:latin typeface="游ゴシック"/>
                         </a:rPr>
-                        <a:t>読み込んだシリアルNo.はシステムに登録されていないため、使用できません。</a:t>
+                        <a:t>端末が存在しません。</a:t>
                       </a:r>
                     </a:p>
                   </a:txBody>
@@ -3940,7 +4528,7 @@
                           </a:solidFill>
                           <a:latin typeface="游ゴシック"/>
                         </a:rPr>
-                        <a:t>端末管理管轄が異なります。再度、端末をご確認ください。</a:t>
+                        <a:t>端末の管轄が異なります。現在の管轄：○○支店</a:t>
                       </a:r>
                     </a:p>
                   </a:txBody>
@@ -4034,7 +4622,7 @@
                           </a:solidFill>
                           <a:latin typeface="游ゴシック"/>
                         </a:rPr>
-                        <a:t>端末情報が更新されました。お手数ですが、最初からやり直してください。</a:t>
+                        <a:t>端末ステータスが異なります。現在のステータス：○○</a:t>
                       </a:r>
                     </a:p>
                   </a:txBody>
@@ -4061,7 +4649,7 @@
                           </a:solidFill>
                           <a:latin typeface="游ゴシック"/>
                         </a:rPr>
-                        <a:t>端末のステータスが処理対象外（回収依頼が出ていない等）</a:t>
+                        <a:t>端末のステータスが処理対象外（回収依頼が出ていない、顧客出庫中、対象外ステータス等）</a:t>
                       </a:r>
                     </a:p>
                   </a:txBody>
@@ -4222,7 +4810,7 @@
                           </a:solidFill>
                           <a:latin typeface="游ゴシック"/>
                         </a:rPr>
-                        <a:t>この端末はセット商品の一部です。残りの端末も同時にスキャンしてから実行してください。</a:t>
+                        <a:t>依頼が存在しません。</a:t>
                       </a:r>
                     </a:p>
                   </a:txBody>
@@ -4249,7 +4837,7 @@
                           </a:solidFill>
                           <a:latin typeface="游ゴシック"/>
                         </a:rPr>
-                        <a:t>セット商品のうち、まだ読み取っていない端末がある</a:t>
+                        <a:t>回収登録で、対象の回収依頼が起票されていない端末</a:t>
                       </a:r>
                     </a:p>
                   </a:txBody>
@@ -4276,101 +4864,7 @@
                           </a:solidFill>
                           <a:latin typeface="游ゴシック"/>
                         </a:rPr>
-                        <a:t>表示された残りの端末もあわせてスキャンしてから再実行</a:t>
-                      </a:r>
-                    </a:p>
-                  </a:txBody>
-                  <a:tcPr anchor="ctr" marT="76200" marB="76200">
-                    <a:solidFill>
-                      <a:srgbClr val="FFFFFF"/>
-                    </a:solidFill>
-                  </a:tcPr>
-                </a:tc>
-              </a:tr>
-              <a:tr h="658368">
-                <a:tc>
-                  <a:txBody>
-                    <a:bodyPr wrap="square"/>
-                    <a:lstStyle/>
-                    <a:p>
-                      <a:r>
-                        <a:rPr b="1" sz="1000">
-                          <a:solidFill>
-                            <a:srgbClr val="2E6FDB"/>
-                          </a:solidFill>
-                          <a:latin typeface="游ゴシック"/>
-                        </a:rPr>
-                        <a:t>【要案内】 </a:t>
-                      </a:r>
-                    </a:p>
-                    <a:p>
-                      <a:pPr>
-                        <a:lnSpc>
-                          <a:spcPct val="120000"/>
-                        </a:lnSpc>
-                      </a:pPr>
-                      <a:r>
-                        <a:rPr sz="1050" b="1">
-                          <a:solidFill>
-                            <a:srgbClr val="172233"/>
-                          </a:solidFill>
-                          <a:latin typeface="游ゴシック"/>
-                        </a:rPr>
-                        <a:t>この端末はキャンセル返却予定のため、処理できません。担当者にご確認ください。</a:t>
-                      </a:r>
-                    </a:p>
-                  </a:txBody>
-                  <a:tcPr anchor="ctr" marT="76200" marB="76200">
-                    <a:solidFill>
-                      <a:srgbClr val="FFFFFF"/>
-                    </a:solidFill>
-                  </a:tcPr>
-                </a:tc>
-                <a:tc>
-                  <a:txBody>
-                    <a:bodyPr wrap="square"/>
-                    <a:lstStyle/>
-                    <a:p>
-                      <a:pPr>
-                        <a:lnSpc>
-                          <a:spcPct val="120000"/>
-                        </a:lnSpc>
-                      </a:pPr>
-                      <a:r>
-                        <a:rPr sz="1050">
-                          <a:solidFill>
-                            <a:srgbClr val="4B5A70"/>
-                          </a:solidFill>
-                          <a:latin typeface="游ゴシック"/>
-                        </a:rPr>
-                        <a:t>契約がすでにキャンセルされている端末</a:t>
-                      </a:r>
-                    </a:p>
-                  </a:txBody>
-                  <a:tcPr anchor="ctr" marT="76200" marB="76200">
-                    <a:solidFill>
-                      <a:srgbClr val="FFFFFF"/>
-                    </a:solidFill>
-                  </a:tcPr>
-                </a:tc>
-                <a:tc>
-                  <a:txBody>
-                    <a:bodyPr wrap="square"/>
-                    <a:lstStyle/>
-                    <a:p>
-                      <a:pPr>
-                        <a:lnSpc>
-                          <a:spcPct val="120000"/>
-                        </a:lnSpc>
-                      </a:pPr>
-                      <a:r>
-                        <a:rPr sz="1050">
-                          <a:solidFill>
-                            <a:srgbClr val="4B5A70"/>
-                          </a:solidFill>
-                          <a:latin typeface="游ゴシック"/>
-                        </a:rPr>
-                        <a:t>エラーではないため処理は止まりません。返却方法を担当者に確認</a:t>
+                        <a:t>PC版で依頼状況を確認。不明な場合は担当者へ</a:t>
                       </a:r>
                     </a:p>
                   </a:txBody>
@@ -4410,7 +4904,101 @@
                           </a:solidFill>
                           <a:latin typeface="游ゴシック"/>
                         </a:rPr>
-                        <a:t>システムエラーを検知したため、処理を中断しました。</a:t>
+                        <a:t>端末ステータスが異なります。現在のステータス：キャンセル返却予定</a:t>
+                      </a:r>
+                    </a:p>
+                  </a:txBody>
+                  <a:tcPr anchor="ctr" marT="76200" marB="76200">
+                    <a:solidFill>
+                      <a:srgbClr val="FFFFFF"/>
+                    </a:solidFill>
+                  </a:tcPr>
+                </a:tc>
+                <a:tc>
+                  <a:txBody>
+                    <a:bodyPr wrap="square"/>
+                    <a:lstStyle/>
+                    <a:p>
+                      <a:pPr>
+                        <a:lnSpc>
+                          <a:spcPct val="120000"/>
+                        </a:lnSpc>
+                      </a:pPr>
+                      <a:r>
+                        <a:rPr sz="1050">
+                          <a:solidFill>
+                            <a:srgbClr val="4B5A70"/>
+                          </a:solidFill>
+                          <a:latin typeface="游ゴシック"/>
+                        </a:rPr>
+                        <a:t>契約がすでにキャンセルされ、返却待ちとなっている端末</a:t>
+                      </a:r>
+                    </a:p>
+                  </a:txBody>
+                  <a:tcPr anchor="ctr" marT="76200" marB="76200">
+                    <a:solidFill>
+                      <a:srgbClr val="FFFFFF"/>
+                    </a:solidFill>
+                  </a:tcPr>
+                </a:tc>
+                <a:tc>
+                  <a:txBody>
+                    <a:bodyPr wrap="square"/>
+                    <a:lstStyle/>
+                    <a:p>
+                      <a:pPr>
+                        <a:lnSpc>
+                          <a:spcPct val="120000"/>
+                        </a:lnSpc>
+                      </a:pPr>
+                      <a:r>
+                        <a:rPr sz="1050">
+                          <a:solidFill>
+                            <a:srgbClr val="4B5A70"/>
+                          </a:solidFill>
+                          <a:latin typeface="游ゴシック"/>
+                        </a:rPr>
+                        <a:t>処理対象外です。返却方法を担当者に確認してください</a:t>
+                      </a:r>
+                    </a:p>
+                  </a:txBody>
+                  <a:tcPr anchor="ctr" marT="76200" marB="76200">
+                    <a:solidFill>
+                      <a:srgbClr val="FFFFFF"/>
+                    </a:solidFill>
+                  </a:tcPr>
+                </a:tc>
+              </a:tr>
+              <a:tr h="658368">
+                <a:tc>
+                  <a:txBody>
+                    <a:bodyPr wrap="square"/>
+                    <a:lstStyle/>
+                    <a:p>
+                      <a:r>
+                        <a:rPr b="1" sz="1000">
+                          <a:solidFill>
+                            <a:srgbClr val="D8433F"/>
+                          </a:solidFill>
+                          <a:latin typeface="游ゴシック"/>
+                        </a:rPr>
+                        <a:t>【エラー】 </a:t>
+                      </a:r>
+                    </a:p>
+                    <a:p>
+                      <a:pPr>
+                        <a:lnSpc>
+                          <a:spcPct val="120000"/>
+                        </a:lnSpc>
+                      </a:pPr>
+                      <a:r>
+                        <a:rPr sz="1050" b="1">
+                          <a:solidFill>
+                            <a:srgbClr val="172233"/>
+                          </a:solidFill>
+                          <a:latin typeface="游ゴシック"/>
+                        </a:rPr>
+                        <a:t>入庫処理に失敗しました。／回収済み登録に失敗しました。</a:t>
                       </a:r>
                     </a:p>
                   </a:txBody>
@@ -4487,7 +5075,7 @@
 </p:sld>
 </file>
 
-<file path=ppt/slides/slide11.xml><?xml version="1.0" encoding="utf-8"?>
+<file path=ppt/slides/slide12.xml><?xml version="1.0" encoding="utf-8"?>
 <p:sld xmlns:a="http://schemas.openxmlformats.org/drawingml/2006/main" xmlns:p="http://schemas.openxmlformats.org/presentationml/2006/main" xmlns:r="http://schemas.openxmlformats.org/officeDocument/2006/relationships">
   <p:cSld>
     <p:spTree>
@@ -5207,7 +5795,7 @@
 </p:sld>
 </file>
 
-<file path=ppt/slides/slide12.xml><?xml version="1.0" encoding="utf-8"?>
+<file path=ppt/slides/slide13.xml><?xml version="1.0" encoding="utf-8"?>
 <p:sld xmlns:a="http://schemas.openxmlformats.org/drawingml/2006/main" xmlns:p="http://schemas.openxmlformats.org/presentationml/2006/main" xmlns:r="http://schemas.openxmlformats.org/officeDocument/2006/relationships">
   <p:cSld>
     <p:spTree>
@@ -10592,6 +11180,25 @@
               <a:t>・バーコードにピントが合わないときは、少し距離を離すか明るい場所で試してください。</a:t>
             </a:r>
           </a:p>
+          <a:p>
+            <a:pPr>
+              <a:lnSpc>
+                <a:spcPct val="125000"/>
+              </a:lnSpc>
+              <a:spcAft>
+                <a:spcPts val="1000"/>
+              </a:spcAft>
+            </a:pPr>
+            <a:r>
+              <a:rPr sz="1300">
+                <a:solidFill>
+                  <a:srgbClr val="4B5A70"/>
+                </a:solidFill>
+                <a:latin typeface="游ゴシック"/>
+              </a:rPr>
+              <a:t>・小型のバーコード等でカメラが読み取りにくい場合は、画面上部で「バーコード」を選ぶとBluetoothスキャナーで読み取れます（次ページ参照）。</a:t>
+            </a:r>
+          </a:p>
         </p:txBody>
       </p:sp>
       <p:sp>
@@ -11277,7 +11884,7 @@
                 </a:solidFill>
                 <a:latin typeface="游ゴシック"/>
               </a:rPr>
-              <a:t>STEP 5 / 6</a:t>
+              <a:t>STEP 4 補足</a:t>
             </a:r>
           </a:p>
         </p:txBody>
@@ -11316,7 +11923,7 @@
                 </a:solidFill>
                 <a:latin typeface="游ゴシック"/>
               </a:rPr>
-              <a:t>まとめて1回で実行する</a:t>
+              <a:t>バーコードスキャナーを使う場合</a:t>
             </a:r>
           </a:p>
         </p:txBody>
@@ -11355,78 +11962,106 @@
                 </a:solidFill>
                 <a:latin typeface="游ゴシック"/>
               </a:rPr>
-              <a:t>読み取った台数分をまとめて、ボタンを1回押すだけで処理が実行されます。1台ずつ確定操作をする必要はありません。ボタンには件数が表示されるので、読み取り漏れがないか確認してから押してください。</a:t>
-            </a:r>
-          </a:p>
-        </p:txBody>
-      </p:sp>
-      <p:sp>
-        <p:nvSpPr>
-          <p:cNvPr id="7" name="Rounded Rectangle 6"/>
-          <p:cNvSpPr/>
-          <p:nvPr/>
-        </p:nvSpPr>
-        <p:spPr>
-          <a:xfrm>
-            <a:off x="640080" y="4846320"/>
-            <a:ext cx="6035040" cy="1371600"/>
-          </a:xfrm>
-          <a:prstGeom prst="roundRect">
-            <a:avLst>
-              <a:gd name="adj" fmla="val 8000"/>
-            </a:avLst>
-          </a:prstGeom>
-          <a:solidFill>
-            <a:srgbClr val="EBEEF5"/>
-          </a:solidFill>
-          <a:ln w="9525">
-            <a:solidFill>
-              <a:srgbClr val="DBE1EC"/>
-            </a:solidFill>
-          </a:ln>
-          <a:effectLst/>
-        </p:spPr>
-        <p:style>
-          <a:lnRef idx="1">
-            <a:schemeClr val="accent1"/>
-          </a:lnRef>
-          <a:fillRef idx="3">
-            <a:schemeClr val="accent1"/>
-          </a:fillRef>
-          <a:effectRef idx="2">
-            <a:schemeClr val="accent1"/>
-          </a:effectRef>
-          <a:fontRef idx="minor">
-            <a:schemeClr val="lt1"/>
-          </a:fontRef>
-        </p:style>
-        <p:txBody>
-          <a:bodyPr rtlCol="0" anchor="ctr" wrap="square" lIns="228600" rIns="228600" tIns="164592" bIns="164592"/>
-          <a:lstStyle/>
-          <a:p>
-            <a:pPr algn="ctr">
+              <a:t>画面上部の切り替えボタンで「バーコード」を選ぶと、Bluetoothバーコードスキャナー（BUSICOM BC-BS801D-V2-CW）で読み取れます。小型のバーコードなど、カメラでは読み取りにくい端末に使用してください。</a:t>
+            </a:r>
+          </a:p>
+        </p:txBody>
+      </p:sp>
+      <p:sp>
+        <p:nvSpPr>
+          <p:cNvPr id="7" name="TextBox 6"/>
+          <p:cNvSpPr txBox="1"/>
+          <p:nvPr/>
+        </p:nvSpPr>
+        <p:spPr>
+          <a:xfrm>
+            <a:off x="640080" y="2651760"/>
+            <a:ext cx="6035040" cy="2926080"/>
+          </a:xfrm>
+          <a:prstGeom prst="rect">
+            <a:avLst/>
+          </a:prstGeom>
+          <a:noFill/>
+        </p:spPr>
+        <p:txBody>
+          <a:bodyPr wrap="square">
+            <a:spAutoFit/>
+          </a:bodyPr>
+          <a:lstStyle/>
+          <a:p>
+            <a:pPr>
               <a:lnSpc>
-                <a:spcPct val="130000"/>
+                <a:spcPct val="125000"/>
               </a:lnSpc>
+              <a:spcAft>
+                <a:spcPts val="1000"/>
+              </a:spcAft>
             </a:pPr>
             <a:r>
-              <a:rPr b="1" sz="1300">
-                <a:solidFill>
-                  <a:srgbClr val="172233"/>
-                </a:solidFill>
-                <a:latin typeface="游ゴシック"/>
-              </a:rPr>
-              <a:t>確認ダイアログは出ません。
-</a:t>
-            </a:r>
-            <a:r>
-              <a:rPr sz="1250">
+              <a:rPr sz="1300">
                 <a:solidFill>
                   <a:srgbClr val="4B5A70"/>
                 </a:solidFill>
                 <a:latin typeface="游ゴシック"/>
               </a:rPr>
-              <a:t>ボタンを押すとすぐに処理が実行されるため、一覧の内容を確認してからタップしてください。</a:t>
+              <a:t>・事前に社用iPhoneの「設定」→「Bluetooth」でスキャナーとペアリングしておきます（[SCAN]ボタンを3秒長押しして電源ON→一覧の「BS80+XXXX」を選択）。</a:t>
+            </a:r>
+          </a:p>
+          <a:p>
+            <a:pPr>
+              <a:lnSpc>
+                <a:spcPct val="125000"/>
+              </a:lnSpc>
+              <a:spcAft>
+                <a:spcPts val="1000"/>
+              </a:spcAft>
+            </a:pPr>
+            <a:r>
+              <a:rPr sz="1300">
+                <a:solidFill>
+                  <a:srgbClr val="4B5A70"/>
+                </a:solidFill>
+                <a:latin typeface="游ゴシック"/>
+              </a:rPr>
+              <a:t>・iPhoneのキーボード言語を「英語（米国）」に設定してください（メーカー仕様。日本語のままだと正しく読み取れません）。</a:t>
+            </a:r>
+          </a:p>
+          <a:p>
+            <a:pPr>
+              <a:lnSpc>
+                <a:spcPct val="125000"/>
+              </a:lnSpc>
+              <a:spcAft>
+                <a:spcPts val="1000"/>
+              </a:spcAft>
+            </a:pPr>
+            <a:r>
+              <a:rPr sz="1300">
+                <a:solidFill>
+                  <a:srgbClr val="4B5A70"/>
+                </a:solidFill>
+                <a:latin typeface="游ゴシック"/>
+              </a:rPr>
+              <a:t>・ペアリング済みであれば、入力欄をタップする必要はありません。「バーコード」選択中にスキャナーでそのまま読み取ってください。</a:t>
+            </a:r>
+          </a:p>
+          <a:p>
+            <a:pPr>
+              <a:lnSpc>
+                <a:spcPct val="125000"/>
+              </a:lnSpc>
+              <a:spcAft>
+                <a:spcPts val="1000"/>
+              </a:spcAft>
+            </a:pPr>
+            <a:r>
+              <a:rPr sz="1300">
+                <a:solidFill>
+                  <a:srgbClr val="4B5A70"/>
+                </a:solidFill>
+                <a:latin typeface="游ゴシック"/>
+              </a:rPr>
+              <a:t>・初期設定は「同期送信」モードのため、スキャナーとiPhoneのBluetoothが切れた状態（支店の外に離れた等）で読み取るとデータが失われます。支店内で使用してください。</a:t>
             </a:r>
           </a:p>
         </p:txBody>
@@ -11640,13 +12275,104 @@
       </p:sp>
       <p:sp>
         <p:nvSpPr>
-          <p:cNvPr id="12" name="TextBox 11"/>
+          <p:cNvPr id="12" name="Oval 11"/>
+          <p:cNvSpPr/>
+          <p:nvPr/>
+        </p:nvSpPr>
+        <p:spPr>
+          <a:xfrm>
+            <a:off x="8805672" y="1819656"/>
+            <a:ext cx="768096" cy="768096"/>
+          </a:xfrm>
+          <a:prstGeom prst="ellipse">
+            <a:avLst/>
+          </a:prstGeom>
+          <a:solidFill>
+            <a:srgbClr val="2E6FDB"/>
+          </a:solidFill>
+          <a:ln>
+            <a:noFill/>
+          </a:ln>
+          <a:effectLst/>
+        </p:spPr>
+        <p:style>
+          <a:lnRef idx="1">
+            <a:schemeClr val="accent1"/>
+          </a:lnRef>
+          <a:fillRef idx="3">
+            <a:schemeClr val="accent1"/>
+          </a:fillRef>
+          <a:effectRef idx="2">
+            <a:schemeClr val="accent1"/>
+          </a:effectRef>
+          <a:fontRef idx="minor">
+            <a:schemeClr val="lt1"/>
+          </a:fontRef>
+        </p:style>
+        <p:txBody>
+          <a:bodyPr rtlCol="0" anchor="ctr"/>
+          <a:lstStyle/>
+          <a:p>
+            <a:pPr algn="ctr"/>
+            <a:r>
+              <a:rPr sz="2200">
+                <a:solidFill>
+                  <a:srgbClr val="FFFFFF"/>
+                </a:solidFill>
+              </a:rPr>
+              <a:t>📡</a:t>
+            </a:r>
+          </a:p>
+        </p:txBody>
+      </p:sp>
+      <p:sp>
+        <p:nvSpPr>
+          <p:cNvPr id="13" name="TextBox 12"/>
           <p:cNvSpPr txBox="1"/>
           <p:nvPr/>
         </p:nvSpPr>
         <p:spPr>
           <a:xfrm>
-            <a:off x="8129016" y="1911096"/>
+            <a:off x="7946136" y="2642616"/>
+            <a:ext cx="2487168" cy="274320"/>
+          </a:xfrm>
+          <a:prstGeom prst="rect">
+            <a:avLst/>
+          </a:prstGeom>
+          <a:noFill/>
+        </p:spPr>
+        <p:txBody>
+          <a:bodyPr wrap="square" anchor="t" lIns="0" rIns="0" tIns="0" bIns="0">
+            <a:spAutoFit/>
+          </a:bodyPr>
+          <a:lstStyle/>
+          <a:p>
+            <a:pPr algn="ctr">
+              <a:lnSpc>
+                <a:spcPct val="100000"/>
+              </a:lnSpc>
+            </a:pPr>
+            <a:r>
+              <a:rPr sz="900" b="0">
+                <a:solidFill>
+                  <a:srgbClr val="4B5A70"/>
+                </a:solidFill>
+                <a:latin typeface="游ゴシック"/>
+              </a:rPr>
+              <a:t>スキャナーで読み取り待機中</a:t>
+            </a:r>
+          </a:p>
+        </p:txBody>
+      </p:sp>
+      <p:sp>
+        <p:nvSpPr>
+          <p:cNvPr id="14" name="TextBox 13"/>
+          <p:cNvSpPr txBox="1"/>
+          <p:nvPr/>
+        </p:nvSpPr>
+        <p:spPr>
+          <a:xfrm>
+            <a:off x="8129016" y="3054096"/>
             <a:ext cx="1389888" cy="274320"/>
           </a:xfrm>
           <a:prstGeom prst="rect">
@@ -11679,13 +12405,13 @@
       </p:sp>
       <p:sp>
         <p:nvSpPr>
-          <p:cNvPr id="13" name="TextBox 12"/>
+          <p:cNvPr id="15" name="TextBox 14"/>
           <p:cNvSpPr txBox="1"/>
           <p:nvPr/>
         </p:nvSpPr>
         <p:spPr>
           <a:xfrm>
-            <a:off x="8129016" y="1911096"/>
+            <a:off x="8129016" y="3054096"/>
             <a:ext cx="2121408" cy="274320"/>
           </a:xfrm>
           <a:prstGeom prst="rect">
@@ -11711,21 +12437,21 @@
                 </a:solidFill>
                 <a:latin typeface="游ゴシック"/>
               </a:rPr>
-              <a:t>3件</a:t>
-            </a:r>
-          </a:p>
-        </p:txBody>
-      </p:sp>
-      <p:sp>
-        <p:nvSpPr>
-          <p:cNvPr id="14" name="Rounded Rectangle 13"/>
+              <a:t>2件</a:t>
+            </a:r>
+          </a:p>
+        </p:txBody>
+      </p:sp>
+      <p:sp>
+        <p:nvSpPr>
+          <p:cNvPr id="16" name="Rounded Rectangle 15"/>
           <p:cNvSpPr/>
           <p:nvPr/>
         </p:nvSpPr>
         <p:spPr>
           <a:xfrm>
-            <a:off x="8129016" y="2276856"/>
-            <a:ext cx="2121408" cy="365760"/>
+            <a:off x="8129016" y="3419856"/>
+            <a:ext cx="2121408" cy="384048"/>
           </a:xfrm>
           <a:prstGeom prst="roundRect">
             <a:avLst>
@@ -11773,14 +12499,14 @@
       </p:sp>
       <p:sp>
         <p:nvSpPr>
-          <p:cNvPr id="15" name="Rounded Rectangle 14"/>
+          <p:cNvPr id="17" name="Rounded Rectangle 16"/>
           <p:cNvSpPr/>
           <p:nvPr/>
         </p:nvSpPr>
         <p:spPr>
           <a:xfrm>
-            <a:off x="8129016" y="2697480"/>
-            <a:ext cx="2121408" cy="365760"/>
+            <a:off x="8129016" y="3877056"/>
+            <a:ext cx="2121408" cy="384048"/>
           </a:xfrm>
           <a:prstGeom prst="roundRect">
             <a:avLst>
@@ -11828,69 +12554,14 @@
       </p:sp>
       <p:sp>
         <p:nvSpPr>
-          <p:cNvPr id="16" name="Rounded Rectangle 15"/>
+          <p:cNvPr id="18" name="Rounded Rectangle 17"/>
           <p:cNvSpPr/>
           <p:nvPr/>
         </p:nvSpPr>
         <p:spPr>
           <a:xfrm>
-            <a:off x="8129016" y="3118104"/>
-            <a:ext cx="2121408" cy="365760"/>
-          </a:xfrm>
-          <a:prstGeom prst="roundRect">
-            <a:avLst>
-              <a:gd name="adj" fmla="val 35000"/>
-            </a:avLst>
-          </a:prstGeom>
-          <a:solidFill>
-            <a:srgbClr val="F5F6F8"/>
-          </a:solidFill>
-          <a:ln>
-            <a:noFill/>
-          </a:ln>
-          <a:effectLst/>
-        </p:spPr>
-        <p:style>
-          <a:lnRef idx="1">
-            <a:schemeClr val="accent1"/>
-          </a:lnRef>
-          <a:fillRef idx="3">
-            <a:schemeClr val="accent1"/>
-          </a:fillRef>
-          <a:effectRef idx="2">
-            <a:schemeClr val="accent1"/>
-          </a:effectRef>
-          <a:fontRef idx="minor">
-            <a:schemeClr val="lt1"/>
-          </a:fontRef>
-        </p:style>
-        <p:txBody>
-          <a:bodyPr rtlCol="0" anchor="ctr"/>
-          <a:lstStyle/>
-          <a:p>
-            <a:pPr algn="ctr"/>
-            <a:r>
-              <a:rPr sz="950">
-                <a:solidFill>
-                  <a:srgbClr val="172233"/>
-                </a:solidFill>
-                <a:latin typeface="Consolas"/>
-              </a:rPr>
-              <a:t>TEST234                     ✕</a:t>
-            </a:r>
-          </a:p>
-        </p:txBody>
-      </p:sp>
-      <p:sp>
-        <p:nvSpPr>
-          <p:cNvPr id="17" name="Rounded Rectangle 16"/>
-          <p:cNvSpPr/>
-          <p:nvPr/>
-        </p:nvSpPr>
-        <p:spPr>
-          <a:xfrm>
-            <a:off x="8129016" y="4288536"/>
-            <a:ext cx="2121408" cy="548640"/>
+            <a:off x="8129016" y="4562856"/>
+            <a:ext cx="2121408" cy="502920"/>
           </a:xfrm>
           <a:prstGeom prst="roundRect">
             <a:avLst>
@@ -11925,13 +12596,13 @@
           <a:p>
             <a:pPr algn="ctr"/>
             <a:r>
-              <a:rPr sz="1300" b="1">
+              <a:rPr sz="1200" b="1">
                 <a:solidFill>
                   <a:srgbClr val="FFFFFF"/>
                 </a:solidFill>
                 <a:latin typeface="游ゴシック"/>
               </a:rPr>
-              <a:t>入庫処理する（3件）</a:t>
+              <a:t>入庫処理する（2件）</a:t>
             </a:r>
           </a:p>
         </p:txBody>
@@ -12078,7 +12749,7 @@
                 </a:solidFill>
                 <a:latin typeface="游ゴシック"/>
               </a:rPr>
-              <a:t>STEP 6 / 6</a:t>
+              <a:t>STEP 5 / 6</a:t>
             </a:r>
           </a:p>
         </p:txBody>
@@ -12117,7 +12788,7 @@
                 </a:solidFill>
                 <a:latin typeface="游ゴシック"/>
               </a:rPr>
-              <a:t>結果を確認する</a:t>
+              <a:t>まとめて1回で実行する</a:t>
             </a:r>
           </a:p>
         </p:txBody>
@@ -12131,7 +12802,7 @@
         <p:spPr>
           <a:xfrm>
             <a:off x="640080" y="1600200"/>
-            <a:ext cx="10881360" cy="2194560"/>
+            <a:ext cx="6035040" cy="2194560"/>
           </a:xfrm>
           <a:prstGeom prst="rect">
             <a:avLst/>
@@ -12156,7 +12827,7 @@
                 </a:solidFill>
                 <a:latin typeface="游ゴシック"/>
               </a:rPr>
-              <a:t>実行すると、成功・エラー・要案内の3パターンで結果が表示されます。成功した分はそのまま確定されるので、エラーの端末だけ確認すれば大丈夫です。</a:t>
+              <a:t>読み取った台数分をまとめて、ボタンを1回押すだけで処理が実行されます。1台ずつ確定操作をする必要はありません。ボタンには件数が表示されるので、読み取り漏れがないか確認してから押してください。</a:t>
             </a:r>
           </a:p>
         </p:txBody>
@@ -12169,16 +12840,16 @@
         </p:nvSpPr>
         <p:spPr>
           <a:xfrm>
-            <a:off x="640080" y="2651760"/>
-            <a:ext cx="3429000" cy="3108960"/>
+            <a:off x="640080" y="4846320"/>
+            <a:ext cx="6035040" cy="1371600"/>
           </a:xfrm>
           <a:prstGeom prst="roundRect">
             <a:avLst>
-              <a:gd name="adj" fmla="val 6000"/>
+              <a:gd name="adj" fmla="val 8000"/>
             </a:avLst>
           </a:prstGeom>
           <a:solidFill>
-            <a:srgbClr val="FFFFFF"/>
+            <a:srgbClr val="EBEEF5"/>
           </a:solidFill>
           <a:ln w="9525">
             <a:solidFill>
@@ -12202,10 +12873,33 @@
           </a:fontRef>
         </p:style>
         <p:txBody>
-          <a:bodyPr rtlCol="0" anchor="ctr"/>
-          <a:lstStyle/>
-          <a:p>
-            <a:pPr algn="ctr"/>
+          <a:bodyPr rtlCol="0" anchor="ctr" wrap="square" lIns="228600" rIns="228600" tIns="164592" bIns="164592"/>
+          <a:lstStyle/>
+          <a:p>
+            <a:pPr algn="ctr">
+              <a:lnSpc>
+                <a:spcPct val="130000"/>
+              </a:lnSpc>
+            </a:pPr>
+            <a:r>
+              <a:rPr b="1" sz="1300">
+                <a:solidFill>
+                  <a:srgbClr val="172233"/>
+                </a:solidFill>
+                <a:latin typeface="游ゴシック"/>
+              </a:rPr>
+              <a:t>確認ダイアログは出ません。
+</a:t>
+            </a:r>
+            <a:r>
+              <a:rPr sz="1250">
+                <a:solidFill>
+                  <a:srgbClr val="4B5A70"/>
+                </a:solidFill>
+                <a:latin typeface="游ゴシック"/>
+              </a:rPr>
+              <a:t>ボタンを押すとすぐに処理が実行されるため、一覧の内容を確認してからタップしてください。</a:t>
+            </a:r>
           </a:p>
         </p:txBody>
       </p:sp>
@@ -12217,8 +12911,458 @@
         </p:nvSpPr>
         <p:spPr>
           <a:xfrm>
-            <a:off x="896112" y="2880360"/>
-            <a:ext cx="1005840" cy="329184"/>
+            <a:off x="7863840" y="777240"/>
+            <a:ext cx="2651760" cy="5120640"/>
+          </a:xfrm>
+          <a:prstGeom prst="roundRect">
+            <a:avLst>
+              <a:gd name="adj" fmla="val 12000"/>
+            </a:avLst>
+          </a:prstGeom>
+          <a:solidFill>
+            <a:srgbClr val="172233"/>
+          </a:solidFill>
+          <a:ln>
+            <a:noFill/>
+          </a:ln>
+          <a:effectLst/>
+        </p:spPr>
+        <p:style>
+          <a:lnRef idx="1">
+            <a:schemeClr val="accent1"/>
+          </a:lnRef>
+          <a:fillRef idx="3">
+            <a:schemeClr val="accent1"/>
+          </a:fillRef>
+          <a:effectRef idx="2">
+            <a:schemeClr val="accent1"/>
+          </a:effectRef>
+          <a:fontRef idx="minor">
+            <a:schemeClr val="lt1"/>
+          </a:fontRef>
+        </p:style>
+        <p:txBody>
+          <a:bodyPr rtlCol="0" anchor="ctr"/>
+          <a:lstStyle/>
+          <a:p>
+            <a:pPr algn="ctr"/>
+          </a:p>
+        </p:txBody>
+      </p:sp>
+      <p:sp>
+        <p:nvSpPr>
+          <p:cNvPr id="9" name="Rounded Rectangle 8"/>
+          <p:cNvSpPr/>
+          <p:nvPr/>
+        </p:nvSpPr>
+        <p:spPr>
+          <a:xfrm>
+            <a:off x="7946136" y="859536"/>
+            <a:ext cx="2487168" cy="4956048"/>
+          </a:xfrm>
+          <a:prstGeom prst="roundRect">
+            <a:avLst>
+              <a:gd name="adj" fmla="val 10000"/>
+            </a:avLst>
+          </a:prstGeom>
+          <a:solidFill>
+            <a:srgbClr val="FFFFFF"/>
+          </a:solidFill>
+          <a:ln>
+            <a:noFill/>
+          </a:ln>
+          <a:effectLst/>
+        </p:spPr>
+        <p:style>
+          <a:lnRef idx="1">
+            <a:schemeClr val="accent1"/>
+          </a:lnRef>
+          <a:fillRef idx="3">
+            <a:schemeClr val="accent1"/>
+          </a:fillRef>
+          <a:effectRef idx="2">
+            <a:schemeClr val="accent1"/>
+          </a:effectRef>
+          <a:fontRef idx="minor">
+            <a:schemeClr val="lt1"/>
+          </a:fontRef>
+        </p:style>
+        <p:txBody>
+          <a:bodyPr rtlCol="0" anchor="ctr"/>
+          <a:lstStyle/>
+          <a:p>
+            <a:pPr algn="ctr"/>
+          </a:p>
+        </p:txBody>
+      </p:sp>
+      <p:sp>
+        <p:nvSpPr>
+          <p:cNvPr id="10" name="Rectangle 9"/>
+          <p:cNvSpPr/>
+          <p:nvPr/>
+        </p:nvSpPr>
+        <p:spPr>
+          <a:xfrm>
+            <a:off x="7946136" y="859536"/>
+            <a:ext cx="2487168" cy="777240"/>
+          </a:xfrm>
+          <a:prstGeom prst="rect">
+            <a:avLst/>
+          </a:prstGeom>
+          <a:solidFill>
+            <a:srgbClr val="264D8B"/>
+          </a:solidFill>
+          <a:ln>
+            <a:noFill/>
+          </a:ln>
+          <a:effectLst/>
+        </p:spPr>
+        <p:style>
+          <a:lnRef idx="1">
+            <a:schemeClr val="accent1"/>
+          </a:lnRef>
+          <a:fillRef idx="3">
+            <a:schemeClr val="accent1"/>
+          </a:fillRef>
+          <a:effectRef idx="2">
+            <a:schemeClr val="accent1"/>
+          </a:effectRef>
+          <a:fontRef idx="minor">
+            <a:schemeClr val="lt1"/>
+          </a:fontRef>
+        </p:style>
+        <p:txBody>
+          <a:bodyPr rtlCol="0" anchor="ctr"/>
+          <a:lstStyle/>
+          <a:p>
+            <a:pPr algn="ctr"/>
+          </a:p>
+        </p:txBody>
+      </p:sp>
+      <p:sp>
+        <p:nvSpPr>
+          <p:cNvPr id="11" name="TextBox 10"/>
+          <p:cNvSpPr txBox="1"/>
+          <p:nvPr/>
+        </p:nvSpPr>
+        <p:spPr>
+          <a:xfrm>
+            <a:off x="8110728" y="969264"/>
+            <a:ext cx="2157984" cy="548640"/>
+          </a:xfrm>
+          <a:prstGeom prst="rect">
+            <a:avLst/>
+          </a:prstGeom>
+          <a:noFill/>
+        </p:spPr>
+        <p:txBody>
+          <a:bodyPr wrap="square" anchor="t" lIns="0" rIns="0" tIns="0" bIns="0">
+            <a:spAutoFit/>
+          </a:bodyPr>
+          <a:lstStyle/>
+          <a:p>
+            <a:pPr algn="l">
+              <a:lnSpc>
+                <a:spcPct val="115000"/>
+              </a:lnSpc>
+            </a:pPr>
+            <a:r>
+              <a:rPr sz="800" b="0">
+                <a:solidFill>
+                  <a:srgbClr val="FFFFFF"/>
+                </a:solidFill>
+                <a:latin typeface="游ゴシック"/>
+              </a:rPr>
+              <a:t>‹ 戻る</a:t>
+            </a:r>
+          </a:p>
+          <a:p>
+            <a:pPr algn="l">
+              <a:lnSpc>
+                <a:spcPct val="115000"/>
+              </a:lnSpc>
+            </a:pPr>
+            <a:r>
+              <a:rPr sz="800" b="0">
+                <a:solidFill>
+                  <a:srgbClr val="FFFFFF"/>
+                </a:solidFill>
+                <a:latin typeface="游ゴシック"/>
+              </a:rPr>
+              <a:t>東京南支店</a:t>
+            </a:r>
+          </a:p>
+          <a:p>
+            <a:pPr algn="l">
+              <a:lnSpc>
+                <a:spcPct val="115000"/>
+              </a:lnSpc>
+            </a:pPr>
+            <a:r>
+              <a:rPr sz="800" b="0">
+                <a:solidFill>
+                  <a:srgbClr val="FFFFFF"/>
+                </a:solidFill>
+                <a:latin typeface="游ゴシック"/>
+              </a:rPr>
+              <a:t>入庫処理</a:t>
+            </a:r>
+          </a:p>
+        </p:txBody>
+      </p:sp>
+      <p:sp>
+        <p:nvSpPr>
+          <p:cNvPr id="12" name="TextBox 11"/>
+          <p:cNvSpPr txBox="1"/>
+          <p:nvPr/>
+        </p:nvSpPr>
+        <p:spPr>
+          <a:xfrm>
+            <a:off x="8129016" y="1911096"/>
+            <a:ext cx="1389888" cy="274320"/>
+          </a:xfrm>
+          <a:prstGeom prst="rect">
+            <a:avLst/>
+          </a:prstGeom>
+          <a:noFill/>
+        </p:spPr>
+        <p:txBody>
+          <a:bodyPr wrap="square" anchor="t" lIns="0" rIns="0" tIns="0" bIns="0">
+            <a:spAutoFit/>
+          </a:bodyPr>
+          <a:lstStyle/>
+          <a:p>
+            <a:pPr algn="l">
+              <a:lnSpc>
+                <a:spcPct val="100000"/>
+              </a:lnSpc>
+            </a:pPr>
+            <a:r>
+              <a:rPr sz="900" b="0">
+                <a:solidFill>
+                  <a:srgbClr val="4B5A70"/>
+                </a:solidFill>
+                <a:latin typeface="游ゴシック"/>
+              </a:rPr>
+              <a:t>読み取り済み</a:t>
+            </a:r>
+          </a:p>
+        </p:txBody>
+      </p:sp>
+      <p:sp>
+        <p:nvSpPr>
+          <p:cNvPr id="13" name="TextBox 12"/>
+          <p:cNvSpPr txBox="1"/>
+          <p:nvPr/>
+        </p:nvSpPr>
+        <p:spPr>
+          <a:xfrm>
+            <a:off x="8129016" y="1911096"/>
+            <a:ext cx="2121408" cy="274320"/>
+          </a:xfrm>
+          <a:prstGeom prst="rect">
+            <a:avLst/>
+          </a:prstGeom>
+          <a:noFill/>
+        </p:spPr>
+        <p:txBody>
+          <a:bodyPr wrap="square" anchor="t" lIns="0" rIns="0" tIns="0" bIns="0">
+            <a:spAutoFit/>
+          </a:bodyPr>
+          <a:lstStyle/>
+          <a:p>
+            <a:pPr algn="r">
+              <a:lnSpc>
+                <a:spcPct val="100000"/>
+              </a:lnSpc>
+            </a:pPr>
+            <a:r>
+              <a:rPr sz="1100" b="1">
+                <a:solidFill>
+                  <a:srgbClr val="172233"/>
+                </a:solidFill>
+                <a:latin typeface="游ゴシック"/>
+              </a:rPr>
+              <a:t>3件</a:t>
+            </a:r>
+          </a:p>
+        </p:txBody>
+      </p:sp>
+      <p:sp>
+        <p:nvSpPr>
+          <p:cNvPr id="14" name="Rounded Rectangle 13"/>
+          <p:cNvSpPr/>
+          <p:nvPr/>
+        </p:nvSpPr>
+        <p:spPr>
+          <a:xfrm>
+            <a:off x="8129016" y="2276856"/>
+            <a:ext cx="2121408" cy="365760"/>
+          </a:xfrm>
+          <a:prstGeom prst="roundRect">
+            <a:avLst>
+              <a:gd name="adj" fmla="val 35000"/>
+            </a:avLst>
+          </a:prstGeom>
+          <a:solidFill>
+            <a:srgbClr val="F5F6F8"/>
+          </a:solidFill>
+          <a:ln>
+            <a:noFill/>
+          </a:ln>
+          <a:effectLst/>
+        </p:spPr>
+        <p:style>
+          <a:lnRef idx="1">
+            <a:schemeClr val="accent1"/>
+          </a:lnRef>
+          <a:fillRef idx="3">
+            <a:schemeClr val="accent1"/>
+          </a:fillRef>
+          <a:effectRef idx="2">
+            <a:schemeClr val="accent1"/>
+          </a:effectRef>
+          <a:fontRef idx="minor">
+            <a:schemeClr val="lt1"/>
+          </a:fontRef>
+        </p:style>
+        <p:txBody>
+          <a:bodyPr rtlCol="0" anchor="ctr"/>
+          <a:lstStyle/>
+          <a:p>
+            <a:pPr algn="ctr"/>
+            <a:r>
+              <a:rPr sz="950">
+                <a:solidFill>
+                  <a:srgbClr val="172233"/>
+                </a:solidFill>
+                <a:latin typeface="Consolas"/>
+              </a:rPr>
+              <a:t>URX0425800033        ✕</a:t>
+            </a:r>
+          </a:p>
+        </p:txBody>
+      </p:sp>
+      <p:sp>
+        <p:nvSpPr>
+          <p:cNvPr id="15" name="Rounded Rectangle 14"/>
+          <p:cNvSpPr/>
+          <p:nvPr/>
+        </p:nvSpPr>
+        <p:spPr>
+          <a:xfrm>
+            <a:off x="8129016" y="2697480"/>
+            <a:ext cx="2121408" cy="365760"/>
+          </a:xfrm>
+          <a:prstGeom prst="roundRect">
+            <a:avLst>
+              <a:gd name="adj" fmla="val 35000"/>
+            </a:avLst>
+          </a:prstGeom>
+          <a:solidFill>
+            <a:srgbClr val="F5F6F8"/>
+          </a:solidFill>
+          <a:ln>
+            <a:noFill/>
+          </a:ln>
+          <a:effectLst/>
+        </p:spPr>
+        <p:style>
+          <a:lnRef idx="1">
+            <a:schemeClr val="accent1"/>
+          </a:lnRef>
+          <a:fillRef idx="3">
+            <a:schemeClr val="accent1"/>
+          </a:fillRef>
+          <a:effectRef idx="2">
+            <a:schemeClr val="accent1"/>
+          </a:effectRef>
+          <a:fontRef idx="minor">
+            <a:schemeClr val="lt1"/>
+          </a:fontRef>
+        </p:style>
+        <p:txBody>
+          <a:bodyPr rtlCol="0" anchor="ctr"/>
+          <a:lstStyle/>
+          <a:p>
+            <a:pPr algn="ctr"/>
+            <a:r>
+              <a:rPr sz="950">
+                <a:solidFill>
+                  <a:srgbClr val="172233"/>
+                </a:solidFill>
+                <a:latin typeface="Consolas"/>
+              </a:rPr>
+              <a:t>HU211003226              ✕</a:t>
+            </a:r>
+          </a:p>
+        </p:txBody>
+      </p:sp>
+      <p:sp>
+        <p:nvSpPr>
+          <p:cNvPr id="16" name="Rounded Rectangle 15"/>
+          <p:cNvSpPr/>
+          <p:nvPr/>
+        </p:nvSpPr>
+        <p:spPr>
+          <a:xfrm>
+            <a:off x="8129016" y="3118104"/>
+            <a:ext cx="2121408" cy="365760"/>
+          </a:xfrm>
+          <a:prstGeom prst="roundRect">
+            <a:avLst>
+              <a:gd name="adj" fmla="val 35000"/>
+            </a:avLst>
+          </a:prstGeom>
+          <a:solidFill>
+            <a:srgbClr val="F5F6F8"/>
+          </a:solidFill>
+          <a:ln>
+            <a:noFill/>
+          </a:ln>
+          <a:effectLst/>
+        </p:spPr>
+        <p:style>
+          <a:lnRef idx="1">
+            <a:schemeClr val="accent1"/>
+          </a:lnRef>
+          <a:fillRef idx="3">
+            <a:schemeClr val="accent1"/>
+          </a:fillRef>
+          <a:effectRef idx="2">
+            <a:schemeClr val="accent1"/>
+          </a:effectRef>
+          <a:fontRef idx="minor">
+            <a:schemeClr val="lt1"/>
+          </a:fontRef>
+        </p:style>
+        <p:txBody>
+          <a:bodyPr rtlCol="0" anchor="ctr"/>
+          <a:lstStyle/>
+          <a:p>
+            <a:pPr algn="ctr"/>
+            <a:r>
+              <a:rPr sz="950">
+                <a:solidFill>
+                  <a:srgbClr val="172233"/>
+                </a:solidFill>
+                <a:latin typeface="Consolas"/>
+              </a:rPr>
+              <a:t>TEST234                     ✕</a:t>
+            </a:r>
+          </a:p>
+        </p:txBody>
+      </p:sp>
+      <p:sp>
+        <p:nvSpPr>
+          <p:cNvPr id="17" name="Rounded Rectangle 16"/>
+          <p:cNvSpPr/>
+          <p:nvPr/>
+        </p:nvSpPr>
+        <p:spPr>
+          <a:xfrm>
+            <a:off x="8129016" y="4288536"/>
+            <a:ext cx="2121408" cy="548640"/>
           </a:xfrm>
           <a:prstGeom prst="roundRect">
             <a:avLst>
@@ -12253,453 +13397,13 @@
           <a:p>
             <a:pPr algn="ctr"/>
             <a:r>
-              <a:rPr sz="1000" b="1">
+              <a:rPr sz="1300" b="1">
                 <a:solidFill>
                   <a:srgbClr val="FFFFFF"/>
                 </a:solidFill>
                 <a:latin typeface="游ゴシック"/>
               </a:rPr>
-              <a:t>成功</a:t>
-            </a:r>
-          </a:p>
-        </p:txBody>
-      </p:sp>
-      <p:sp>
-        <p:nvSpPr>
-          <p:cNvPr id="9" name="TextBox 8"/>
-          <p:cNvSpPr txBox="1"/>
-          <p:nvPr/>
-        </p:nvSpPr>
-        <p:spPr>
-          <a:xfrm>
-            <a:off x="896112" y="3337560"/>
-            <a:ext cx="2916936" cy="640080"/>
-          </a:xfrm>
-          <a:prstGeom prst="rect">
-            <a:avLst/>
-          </a:prstGeom>
-          <a:noFill/>
-        </p:spPr>
-        <p:txBody>
-          <a:bodyPr wrap="square" anchor="t" lIns="0" rIns="0" tIns="0" bIns="0">
-            <a:spAutoFit/>
-          </a:bodyPr>
-          <a:lstStyle/>
-          <a:p>
-            <a:pPr algn="l">
-              <a:lnSpc>
-                <a:spcPct val="120000"/>
-              </a:lnSpc>
-            </a:pPr>
-            <a:r>
-              <a:rPr sz="1500" b="1">
-                <a:solidFill>
-                  <a:srgbClr val="172233"/>
-                </a:solidFill>
-                <a:latin typeface="游ゴシック"/>
-              </a:rPr>
-              <a:t>✓ 処理が完了しました</a:t>
-            </a:r>
-          </a:p>
-        </p:txBody>
-      </p:sp>
-      <p:sp>
-        <p:nvSpPr>
-          <p:cNvPr id="10" name="TextBox 9"/>
-          <p:cNvSpPr txBox="1"/>
-          <p:nvPr/>
-        </p:nvSpPr>
-        <p:spPr>
-          <a:xfrm>
-            <a:off x="896112" y="3977639"/>
-            <a:ext cx="2916936" cy="1554480"/>
-          </a:xfrm>
-          <a:prstGeom prst="rect">
-            <a:avLst/>
-          </a:prstGeom>
-          <a:noFill/>
-        </p:spPr>
-        <p:txBody>
-          <a:bodyPr wrap="square" anchor="t" lIns="0" rIns="0" tIns="0" bIns="0">
-            <a:spAutoFit/>
-          </a:bodyPr>
-          <a:lstStyle/>
-          <a:p>
-            <a:pPr algn="l">
-              <a:lnSpc>
-                <a:spcPct val="140000"/>
-              </a:lnSpc>
-            </a:pPr>
-            <a:r>
-              <a:rPr sz="1200" b="0">
-                <a:solidFill>
-                  <a:srgbClr val="4B5A70"/>
-                </a:solidFill>
-                <a:latin typeface="游ゴシック"/>
-              </a:rPr>
-              <a:t>読み取った端末の登録が完了しています。特に対応は不要です。</a:t>
-            </a:r>
-          </a:p>
-        </p:txBody>
-      </p:sp>
-      <p:sp>
-        <p:nvSpPr>
-          <p:cNvPr id="11" name="Rounded Rectangle 10"/>
-          <p:cNvSpPr/>
-          <p:nvPr/>
-        </p:nvSpPr>
-        <p:spPr>
-          <a:xfrm>
-            <a:off x="4325112" y="2651760"/>
-            <a:ext cx="3429000" cy="3108960"/>
-          </a:xfrm>
-          <a:prstGeom prst="roundRect">
-            <a:avLst>
-              <a:gd name="adj" fmla="val 6000"/>
-            </a:avLst>
-          </a:prstGeom>
-          <a:solidFill>
-            <a:srgbClr val="FFFFFF"/>
-          </a:solidFill>
-          <a:ln w="9525">
-            <a:solidFill>
-              <a:srgbClr val="DBE1EC"/>
-            </a:solidFill>
-          </a:ln>
-          <a:effectLst/>
-        </p:spPr>
-        <p:style>
-          <a:lnRef idx="1">
-            <a:schemeClr val="accent1"/>
-          </a:lnRef>
-          <a:fillRef idx="3">
-            <a:schemeClr val="accent1"/>
-          </a:fillRef>
-          <a:effectRef idx="2">
-            <a:schemeClr val="accent1"/>
-          </a:effectRef>
-          <a:fontRef idx="minor">
-            <a:schemeClr val="lt1"/>
-          </a:fontRef>
-        </p:style>
-        <p:txBody>
-          <a:bodyPr rtlCol="0" anchor="ctr"/>
-          <a:lstStyle/>
-          <a:p>
-            <a:pPr algn="ctr"/>
-          </a:p>
-        </p:txBody>
-      </p:sp>
-      <p:sp>
-        <p:nvSpPr>
-          <p:cNvPr id="12" name="Rounded Rectangle 11"/>
-          <p:cNvSpPr/>
-          <p:nvPr/>
-        </p:nvSpPr>
-        <p:spPr>
-          <a:xfrm>
-            <a:off x="4581144" y="2880360"/>
-            <a:ext cx="1005840" cy="329184"/>
-          </a:xfrm>
-          <a:prstGeom prst="roundRect">
-            <a:avLst>
-              <a:gd name="adj" fmla="val 50000"/>
-            </a:avLst>
-          </a:prstGeom>
-          <a:solidFill>
-            <a:srgbClr val="D8433F"/>
-          </a:solidFill>
-          <a:ln>
-            <a:noFill/>
-          </a:ln>
-          <a:effectLst/>
-        </p:spPr>
-        <p:style>
-          <a:lnRef idx="1">
-            <a:schemeClr val="accent1"/>
-          </a:lnRef>
-          <a:fillRef idx="3">
-            <a:schemeClr val="accent1"/>
-          </a:fillRef>
-          <a:effectRef idx="2">
-            <a:schemeClr val="accent1"/>
-          </a:effectRef>
-          <a:fontRef idx="minor">
-            <a:schemeClr val="lt1"/>
-          </a:fontRef>
-        </p:style>
-        <p:txBody>
-          <a:bodyPr rtlCol="0" anchor="ctr" wrap="none" lIns="0" rIns="0" tIns="0" bIns="0"/>
-          <a:lstStyle/>
-          <a:p>
-            <a:pPr algn="ctr"/>
-            <a:r>
-              <a:rPr sz="1000" b="1">
-                <a:solidFill>
-                  <a:srgbClr val="FFFFFF"/>
-                </a:solidFill>
-                <a:latin typeface="游ゴシック"/>
-              </a:rPr>
-              <a:t>エラー</a:t>
-            </a:r>
-          </a:p>
-        </p:txBody>
-      </p:sp>
-      <p:sp>
-        <p:nvSpPr>
-          <p:cNvPr id="13" name="TextBox 12"/>
-          <p:cNvSpPr txBox="1"/>
-          <p:nvPr/>
-        </p:nvSpPr>
-        <p:spPr>
-          <a:xfrm>
-            <a:off x="4581144" y="3337560"/>
-            <a:ext cx="2916936" cy="640080"/>
-          </a:xfrm>
-          <a:prstGeom prst="rect">
-            <a:avLst/>
-          </a:prstGeom>
-          <a:noFill/>
-        </p:spPr>
-        <p:txBody>
-          <a:bodyPr wrap="square" anchor="t" lIns="0" rIns="0" tIns="0" bIns="0">
-            <a:spAutoFit/>
-          </a:bodyPr>
-          <a:lstStyle/>
-          <a:p>
-            <a:pPr algn="l">
-              <a:lnSpc>
-                <a:spcPct val="120000"/>
-              </a:lnSpc>
-            </a:pPr>
-            <a:r>
-              <a:rPr sz="1500" b="1">
-                <a:solidFill>
-                  <a:srgbClr val="172233"/>
-                </a:solidFill>
-                <a:latin typeface="游ゴシック"/>
-              </a:rPr>
-              <a:t>⚠ 一部の処理に失敗しました</a:t>
-            </a:r>
-          </a:p>
-        </p:txBody>
-      </p:sp>
-      <p:sp>
-        <p:nvSpPr>
-          <p:cNvPr id="14" name="TextBox 13"/>
-          <p:cNvSpPr txBox="1"/>
-          <p:nvPr/>
-        </p:nvSpPr>
-        <p:spPr>
-          <a:xfrm>
-            <a:off x="4581144" y="3977639"/>
-            <a:ext cx="2916936" cy="1554480"/>
-          </a:xfrm>
-          <a:prstGeom prst="rect">
-            <a:avLst/>
-          </a:prstGeom>
-          <a:noFill/>
-        </p:spPr>
-        <p:txBody>
-          <a:bodyPr wrap="square" anchor="t" lIns="0" rIns="0" tIns="0" bIns="0">
-            <a:spAutoFit/>
-          </a:bodyPr>
-          <a:lstStyle/>
-          <a:p>
-            <a:pPr algn="l">
-              <a:lnSpc>
-                <a:spcPct val="140000"/>
-              </a:lnSpc>
-            </a:pPr>
-            <a:r>
-              <a:rPr sz="1200" b="0">
-                <a:solidFill>
-                  <a:srgbClr val="4B5A70"/>
-                </a:solidFill>
-                <a:latin typeface="游ゴシック"/>
-              </a:rPr>
-              <a:t>エラーの端末とメッセージが表示されます。「続けて処理する」で再度スキャンしてやり直せます。</a:t>
-            </a:r>
-          </a:p>
-        </p:txBody>
-      </p:sp>
-      <p:sp>
-        <p:nvSpPr>
-          <p:cNvPr id="15" name="Rounded Rectangle 14"/>
-          <p:cNvSpPr/>
-          <p:nvPr/>
-        </p:nvSpPr>
-        <p:spPr>
-          <a:xfrm>
-            <a:off x="8010144" y="2651760"/>
-            <a:ext cx="3429000" cy="3108960"/>
-          </a:xfrm>
-          <a:prstGeom prst="roundRect">
-            <a:avLst>
-              <a:gd name="adj" fmla="val 6000"/>
-            </a:avLst>
-          </a:prstGeom>
-          <a:solidFill>
-            <a:srgbClr val="FFFFFF"/>
-          </a:solidFill>
-          <a:ln w="9525">
-            <a:solidFill>
-              <a:srgbClr val="DBE1EC"/>
-            </a:solidFill>
-          </a:ln>
-          <a:effectLst/>
-        </p:spPr>
-        <p:style>
-          <a:lnRef idx="1">
-            <a:schemeClr val="accent1"/>
-          </a:lnRef>
-          <a:fillRef idx="3">
-            <a:schemeClr val="accent1"/>
-          </a:fillRef>
-          <a:effectRef idx="2">
-            <a:schemeClr val="accent1"/>
-          </a:effectRef>
-          <a:fontRef idx="minor">
-            <a:schemeClr val="lt1"/>
-          </a:fontRef>
-        </p:style>
-        <p:txBody>
-          <a:bodyPr rtlCol="0" anchor="ctr"/>
-          <a:lstStyle/>
-          <a:p>
-            <a:pPr algn="ctr"/>
-          </a:p>
-        </p:txBody>
-      </p:sp>
-      <p:sp>
-        <p:nvSpPr>
-          <p:cNvPr id="16" name="Rounded Rectangle 15"/>
-          <p:cNvSpPr/>
-          <p:nvPr/>
-        </p:nvSpPr>
-        <p:spPr>
-          <a:xfrm>
-            <a:off x="8266176" y="2880360"/>
-            <a:ext cx="1005840" cy="329184"/>
-          </a:xfrm>
-          <a:prstGeom prst="roundRect">
-            <a:avLst>
-              <a:gd name="adj" fmla="val 50000"/>
-            </a:avLst>
-          </a:prstGeom>
-          <a:solidFill>
-            <a:srgbClr val="2E6FDB"/>
-          </a:solidFill>
-          <a:ln>
-            <a:noFill/>
-          </a:ln>
-          <a:effectLst/>
-        </p:spPr>
-        <p:style>
-          <a:lnRef idx="1">
-            <a:schemeClr val="accent1"/>
-          </a:lnRef>
-          <a:fillRef idx="3">
-            <a:schemeClr val="accent1"/>
-          </a:fillRef>
-          <a:effectRef idx="2">
-            <a:schemeClr val="accent1"/>
-          </a:effectRef>
-          <a:fontRef idx="minor">
-            <a:schemeClr val="lt1"/>
-          </a:fontRef>
-        </p:style>
-        <p:txBody>
-          <a:bodyPr rtlCol="0" anchor="ctr" wrap="none" lIns="0" rIns="0" tIns="0" bIns="0"/>
-          <a:lstStyle/>
-          <a:p>
-            <a:pPr algn="ctr"/>
-            <a:r>
-              <a:rPr sz="1000" b="1">
-                <a:solidFill>
-                  <a:srgbClr val="FFFFFF"/>
-                </a:solidFill>
-                <a:latin typeface="游ゴシック"/>
-              </a:rPr>
-              <a:t>要案内</a:t>
-            </a:r>
-          </a:p>
-        </p:txBody>
-      </p:sp>
-      <p:sp>
-        <p:nvSpPr>
-          <p:cNvPr id="17" name="TextBox 16"/>
-          <p:cNvSpPr txBox="1"/>
-          <p:nvPr/>
-        </p:nvSpPr>
-        <p:spPr>
-          <a:xfrm>
-            <a:off x="8266176" y="3337560"/>
-            <a:ext cx="2916936" cy="640080"/>
-          </a:xfrm>
-          <a:prstGeom prst="rect">
-            <a:avLst/>
-          </a:prstGeom>
-          <a:noFill/>
-        </p:spPr>
-        <p:txBody>
-          <a:bodyPr wrap="square" anchor="t" lIns="0" rIns="0" tIns="0" bIns="0">
-            <a:spAutoFit/>
-          </a:bodyPr>
-          <a:lstStyle/>
-          <a:p>
-            <a:pPr algn="l">
-              <a:lnSpc>
-                <a:spcPct val="120000"/>
-              </a:lnSpc>
-            </a:pPr>
-            <a:r>
-              <a:rPr sz="1500" b="1">
-                <a:solidFill>
-                  <a:srgbClr val="172233"/>
-                </a:solidFill>
-                <a:latin typeface="游ゴシック"/>
-              </a:rPr>
-              <a:t>要確認の端末があります</a:t>
-            </a:r>
-          </a:p>
-        </p:txBody>
-      </p:sp>
-      <p:sp>
-        <p:nvSpPr>
-          <p:cNvPr id="18" name="TextBox 17"/>
-          <p:cNvSpPr txBox="1"/>
-          <p:nvPr/>
-        </p:nvSpPr>
-        <p:spPr>
-          <a:xfrm>
-            <a:off x="8266176" y="3977639"/>
-            <a:ext cx="2916936" cy="1554480"/>
-          </a:xfrm>
-          <a:prstGeom prst="rect">
-            <a:avLst/>
-          </a:prstGeom>
-          <a:noFill/>
-        </p:spPr>
-        <p:txBody>
-          <a:bodyPr wrap="square" anchor="t" lIns="0" rIns="0" tIns="0" bIns="0">
-            <a:spAutoFit/>
-          </a:bodyPr>
-          <a:lstStyle/>
-          <a:p>
-            <a:pPr algn="l">
-              <a:lnSpc>
-                <a:spcPct val="140000"/>
-              </a:lnSpc>
-            </a:pPr>
-            <a:r>
-              <a:rPr sz="1200" b="0">
-                <a:solidFill>
-                  <a:srgbClr val="4B5A70"/>
-                </a:solidFill>
-                <a:latin typeface="游ゴシック"/>
-              </a:rPr>
-              <a:t>エラーではありませんが、そのまま処理できない端末です。案内に従って担当者に確認してください。</a:t>
+              <a:t>入庫処理する（3件）</a:t>
             </a:r>
           </a:p>
         </p:txBody>
